--- a/Б.7.5_Модули/Б.7.5_Модуль1_Общие_требования_ПБ.pptx
+++ b/Б.7.5_Модули/Б.7.5_Модуль1_Общие_требования_ПБ.pptx
@@ -4302,7 +4302,7 @@
                 </a:solidFill>
                 <a:latin typeface="Inter"/>
               </a:rPr>
-              <a:t>116-ФЗ «О промышленной безопасности опасных производственных объектов» — цели, принципы, категории ОПО.</a:t>
+              <a:t>116-ФЗ — правовые основы ПБ ОПО; аттестация по Б.7.5 (ПП РФ № 2168, № 978) не реже 1 раза в 5 лет (ст. 14.1).</a:t>
             </a:r>
           </a:p>
         </p:txBody>
@@ -4372,7 +4372,7 @@
                 </a:solidFill>
                 <a:latin typeface="Inter"/>
               </a:rPr>
-              <a:t>Постановление Правительства РФ № 2168 — категории работников, подлежащих аттестации.</a:t>
+              <a:t>Ростехнадзор — государственный контроль (надзор) при СМР, реконструкции, капремонте (ПП РФ № 870, п. 2, 88).</a:t>
             </a:r>
           </a:p>
         </p:txBody>
@@ -4442,7 +4442,7 @@
                 </a:solidFill>
                 <a:latin typeface="Inter"/>
               </a:rPr>
-              <a:t>Положение об аттестации (ПП РФ № 978) — порядок подготовки и проверки знаний.</a:t>
+              <a:t>Производственный контроль: программа, ответственные лица, хранение документации (ФНП № 531, п. 5–6).</a:t>
             </a:r>
           </a:p>
         </p:txBody>
@@ -4512,7 +4512,7 @@
                 </a:solidFill>
                 <a:latin typeface="Inter"/>
               </a:rPr>
-              <a:t>Ответственность за нарушение требований промышленной безопасности (административная и уголовная).</a:t>
+              <a:t>ФНП № 531 — требования на всех этапах жизненного цикла сетей газораспределения и газопотребления.</a:t>
             </a:r>
           </a:p>
         </p:txBody>
@@ -4756,7 +4756,7 @@
                 </a:solidFill>
                 <a:latin typeface="Inter"/>
               </a:rPr>
-              <a:t>Производственный контроль: цели, программа, документирование результатов.</a:t>
+              <a:t>Производственный контроль и назначение ответственных лиц (ФНП № 531, п. 5–6).</a:t>
             </a:r>
           </a:p>
         </p:txBody>
@@ -4826,7 +4826,7 @@
                 </a:solidFill>
                 <a:latin typeface="Inter"/>
               </a:rPr>
-              <a:t>Контрольно-надзорная деятельность Ростехнадзора при строительстве и реконструкции сетей.</a:t>
+              <a:t>Идентификация объектов: проект, экспертиза, разрешение на строительство, акт приёмки (ТР п. 12–13).</a:t>
             </a:r>
           </a:p>
         </p:txBody>
@@ -4896,7 +4896,7 @@
                 </a:solidFill>
                 <a:latin typeface="Inter"/>
               </a:rPr>
-              <a:t>Регистрация объектов в государственном реестре ОПО; декларирование промышленной безопасности.</a:t>
+              <a:t>Экспертиза промышленной безопасности; регистрация ОПО в государственном реестре.</a:t>
             </a:r>
           </a:p>
         </p:txBody>
@@ -4966,7 +4966,7 @@
                 </a:solidFill>
                 <a:latin typeface="Inter"/>
               </a:rPr>
-              <a:t>Общие требования ФНП № 531 к организациям, выполняющим работы на сетях газораспределения и газопотребления.</a:t>
+              <a:t>Общие требования ФНП № 531 к организациям на объектах газораспределения и газопотребления.</a:t>
             </a:r>
           </a:p>
         </p:txBody>
@@ -5245,7 +5245,7 @@
                 </a:solidFill>
                 <a:latin typeface="Inter"/>
               </a:rPr>
-              <a:t>116-ФЗ — основа правового регулирования промышленной безопасности ОПО.</a:t>
+              <a:t>116-ФЗ и приказ № 155 (п. 18.1): правовые основы ПБ, аттестация по Б.7.5 не реже 1 раза в 5 лет.</a:t>
             </a:r>
           </a:p>
         </p:txBody>
@@ -5315,7 +5315,7 @@
                 </a:solidFill>
                 <a:latin typeface="Inter"/>
               </a:rPr>
-              <a:t>Аттестация по Б.7.5 обязательна для ответственных специалистов не реже 1 раза в 5 лет.</a:t>
+              <a:t>Ростехнадзор — надзор при СМР, реконструкции, капремонте; экспертиза и приёмка по ПП РФ № 870.</a:t>
             </a:r>
           </a:p>
         </p:txBody>
@@ -5385,7 +5385,7 @@
                 </a:solidFill>
                 <a:latin typeface="Inter"/>
               </a:rPr>
-              <a:t>Производственный контроль и надзор Ростехнадзора — ключевые механизмы обеспечения безопасности.</a:t>
+              <a:t>Производственный контроль и назначение ответственных лиц — ФНП № 531, п. 5–6.</a:t>
             </a:r>
           </a:p>
         </p:txBody>
@@ -5455,7 +5455,7 @@
                 </a:solidFill>
                 <a:latin typeface="Inter"/>
               </a:rPr>
-              <a:t>ФНП № 531 определяет общие требования ко всем этапам жизненного цикла газовых сетей.</a:t>
+              <a:t>ФНП № 531 определяет требования на всех этапах жизненного цикла газовых сетей.</a:t>
             </a:r>
           </a:p>
         </p:txBody>
